--- a/assets/powerpoints/module-n2-classe/E1-je-me-lance.pptx
+++ b/assets/powerpoints/module-n2-classe/E1-je-me-lance.pptx
@@ -8823,7 +8823,25 @@
                 </a:solidFill>
                 <a:latin typeface="Verdana"/>
               </a:rPr>
-              <a:t>« Le cours commence à huit heures et demie. La pause est à dix heures. Apportez un cahier et un crayon. Le téléphone est &lt;b&gt;interdit&lt;/b&gt; en classe. » Quatre phrases, quatre renseignements, et la personne a tout ce qu'il lui faut.</a:t>
+              <a:t>« Le cours commence à huit heures et demie. La pause est à dix heures. Apportez un cahier et un crayon. Le téléphone est </a:t>
+            </a:r>
+            <a:r>
+              <a:rPr sz="2000" b="1" i="0">
+                <a:solidFill>
+                  <a:srgbClr val="4B4F52"/>
+                </a:solidFill>
+                <a:latin typeface="Verdana"/>
+              </a:rPr>
+              <a:t>interdit</a:t>
+            </a:r>
+            <a:r>
+              <a:rPr sz="2000" b="0" i="0">
+                <a:solidFill>
+                  <a:srgbClr val="4B4F52"/>
+                </a:solidFill>
+                <a:latin typeface="Verdana"/>
+              </a:rPr>
+              <a:t> en classe. » Quatre phrases, quatre renseignements, et la personne a tout ce qu'il lui faut.</a:t>
             </a:r>
           </a:p>
         </p:txBody>
